--- a/その他/高校対応/自己紹介.pptx
+++ b/その他/高校対応/自己紹介.pptx
@@ -4597,11 +4597,7 @@
             </a:pPr>
             <a:r>
               <a:rPr lang="ja-JP" altLang="en-US" dirty="0"/>
-              <a:t>・ゲーム数学</a:t>
-            </a:r>
-            <a:r>
-              <a:rPr lang="ja-JP" altLang="en-US"/>
-              <a:t>（幾何学や物理学など）</a:t>
+              <a:t>・ゲーム数学（幾何学や物理学など）</a:t>
             </a:r>
             <a:endParaRPr lang="en-US" altLang="ja-JP" dirty="0"/>
           </a:p>
@@ -4617,7 +4613,15 @@
             </a:pPr>
             <a:r>
               <a:rPr kumimoji="1" lang="ja-JP" altLang="en-US" dirty="0"/>
-              <a:t>ゲームに関することは大抵教えられます！</a:t>
+              <a:t>ゲームに関することは</a:t>
+            </a:r>
+            <a:r>
+              <a:rPr lang="ja-JP" altLang="en-US" dirty="0"/>
+              <a:t>全部</a:t>
+            </a:r>
+            <a:r>
+              <a:rPr kumimoji="1" lang="ja-JP" altLang="en-US" dirty="0"/>
+              <a:t>教えられます！</a:t>
             </a:r>
           </a:p>
         </p:txBody>
